--- a/ADG/_실측판/05장/5장_PhysicalStandby생성_RMAN_DUPLICATE.pptx
+++ b/ADG/_실측판/05장/5장_PhysicalStandby생성_RMAN_DUPLICATE.pptx
@@ -6299,7 +6299,26 @@
                 </a:solidFill>
                 <a:latin typeface="맑은 고딕"/>
               </a:rPr>
-              <a:t>•  `db_name=chicago` — Primary와 같아야 한다</a:t>
+              <a:t>•  </a:t>
+            </a:r>
+            <a:r>
+              <a:rPr sz="1700" b="0">
+                <a:solidFill>
+                  <a:srgbClr val="222222"/>
+                </a:solidFill>
+                <a:latin typeface="Consolas"/>
+                <a:cs typeface="Consolas"/>
+              </a:rPr>
+              <a:t>db_name=chicago</a:t>
+            </a:r>
+            <a:r>
+              <a:rPr sz="1700" b="0">
+                <a:solidFill>
+                  <a:srgbClr val="222222"/>
+                </a:solidFill>
+                <a:latin typeface="맑은 고딕"/>
+              </a:rPr>
+              <a:t> — Primary와 같아야 한다</a:t>
             </a:r>
           </a:p>
           <a:p>
@@ -6315,7 +6334,26 @@
                 </a:solidFill>
                 <a:latin typeface="맑은 고딕"/>
               </a:rPr>
-              <a:t>•  `enable_pluggable_database=true` — CDB이므로</a:t>
+              <a:t>•  </a:t>
+            </a:r>
+            <a:r>
+              <a:rPr sz="1700" b="0">
+                <a:solidFill>
+                  <a:srgbClr val="222222"/>
+                </a:solidFill>
+                <a:latin typeface="Consolas"/>
+                <a:cs typeface="Consolas"/>
+              </a:rPr>
+              <a:t>enable_pluggable_database=true</a:t>
+            </a:r>
+            <a:r>
+              <a:rPr sz="1700" b="0">
+                <a:solidFill>
+                  <a:srgbClr val="222222"/>
+                </a:solidFill>
+                <a:latin typeface="맑은 고딕"/>
+              </a:rPr>
+              <a:t> — CDB이므로</a:t>
             </a:r>
           </a:p>
           <a:p>
@@ -6590,7 +6628,25 @@
                 </a:solidFill>
                 <a:latin typeface="맑은 고딕"/>
               </a:rPr>
-              <a:t>•  **DB_NAME = chicago** ← 이것만 다르다</a:t>
+              <a:t>•  </a:t>
+            </a:r>
+            <a:r>
+              <a:rPr sz="1700" b="1">
+                <a:solidFill>
+                  <a:srgbClr val="222222"/>
+                </a:solidFill>
+                <a:latin typeface="맑은 고딕"/>
+              </a:rPr>
+              <a:t>DB_NAME = chicago</a:t>
+            </a:r>
+            <a:r>
+              <a:rPr sz="1700" b="0">
+                <a:solidFill>
+                  <a:srgbClr val="222222"/>
+                </a:solidFill>
+                <a:latin typeface="맑은 고딕"/>
+              </a:rPr>
+              <a:t> ← 이것만 다르다</a:t>
             </a:r>
           </a:p>
         </p:txBody>
@@ -6769,7 +6825,17 @@
                 </a:solidFill>
                 <a:latin typeface="맑은 고딕"/>
               </a:rPr>
-              <a:t>•  `STARTUP NOMOUNT PFILE='.../initboston.ora'`</a:t>
+              <a:t>•  </a:t>
+            </a:r>
+            <a:r>
+              <a:rPr sz="1700" b="0">
+                <a:solidFill>
+                  <a:srgbClr val="222222"/>
+                </a:solidFill>
+                <a:latin typeface="Consolas"/>
+                <a:cs typeface="Consolas"/>
+              </a:rPr>
+              <a:t>STARTUP NOMOUNT PFILE='.../initboston.ora'</a:t>
             </a:r>
           </a:p>
           <a:p>
@@ -7028,7 +7094,26 @@
                 </a:solidFill>
                 <a:latin typeface="맑은 고딕"/>
               </a:rPr>
-              <a:t>•  있으면 → `status UNKNOWN`으로 접속을 넘겨준다</a:t>
+              <a:t>•  있으면 → </a:t>
+            </a:r>
+            <a:r>
+              <a:rPr sz="1700" b="0">
+                <a:solidFill>
+                  <a:srgbClr val="222222"/>
+                </a:solidFill>
+                <a:latin typeface="Consolas"/>
+                <a:cs typeface="Consolas"/>
+              </a:rPr>
+              <a:t>status UNKNOWN</a:t>
+            </a:r>
+            <a:r>
+              <a:rPr sz="1700" b="0">
+                <a:solidFill>
+                  <a:srgbClr val="222222"/>
+                </a:solidFill>
+                <a:latin typeface="맑은 고딕"/>
+              </a:rPr>
+              <a:t>으로 접속을 넘겨준다</a:t>
             </a:r>
           </a:p>
           <a:p>
@@ -7044,7 +7129,26 @@
                 </a:solidFill>
                 <a:latin typeface="맑은 고딕"/>
               </a:rPr>
-              <a:t>•  Primary에서 `sqlplus "sys/oracle@boston as sysdba"`가 되어야 시작할 수 있다</a:t>
+              <a:t>•  Primary에서 </a:t>
+            </a:r>
+            <a:r>
+              <a:rPr sz="1700" b="0">
+                <a:solidFill>
+                  <a:srgbClr val="222222"/>
+                </a:solidFill>
+                <a:latin typeface="Consolas"/>
+                <a:cs typeface="Consolas"/>
+              </a:rPr>
+              <a:t>sqlplus "sys/oracle@boston as sysdba"</a:t>
+            </a:r>
+            <a:r>
+              <a:rPr sz="1700" b="0">
+                <a:solidFill>
+                  <a:srgbClr val="222222"/>
+                </a:solidFill>
+                <a:latin typeface="맑은 고딕"/>
+              </a:rPr>
+              <a:t>가 되어야 시작할 수 있다</a:t>
             </a:r>
           </a:p>
         </p:txBody>
@@ -7478,7 +7582,26 @@
                 </a:solidFill>
                 <a:latin typeface="맑은 고딕"/>
               </a:rPr>
-              <a:t>•  `for standby` — DBID 유지, standby 컨트롤 파일</a:t>
+              <a:t>•  </a:t>
+            </a:r>
+            <a:r>
+              <a:rPr sz="1700" b="0">
+                <a:solidFill>
+                  <a:srgbClr val="222222"/>
+                </a:solidFill>
+                <a:latin typeface="Consolas"/>
+                <a:cs typeface="Consolas"/>
+              </a:rPr>
+              <a:t>for standby</a:t>
+            </a:r>
+            <a:r>
+              <a:rPr sz="1700" b="0">
+                <a:solidFill>
+                  <a:srgbClr val="222222"/>
+                </a:solidFill>
+                <a:latin typeface="맑은 고딕"/>
+              </a:rPr>
+              <a:t> — DBID 유지, standby 컨트롤 파일</a:t>
             </a:r>
           </a:p>
           <a:p>
@@ -7494,7 +7617,26 @@
                 </a:solidFill>
                 <a:latin typeface="맑은 고딕"/>
               </a:rPr>
-              <a:t>•  `from active database` — 운영 중 Primary에서 직접</a:t>
+              <a:t>•  </a:t>
+            </a:r>
+            <a:r>
+              <a:rPr sz="1700" b="0">
+                <a:solidFill>
+                  <a:srgbClr val="222222"/>
+                </a:solidFill>
+                <a:latin typeface="Consolas"/>
+                <a:cs typeface="Consolas"/>
+              </a:rPr>
+              <a:t>from active database</a:t>
+            </a:r>
+            <a:r>
+              <a:rPr sz="1700" b="0">
+                <a:solidFill>
+                  <a:srgbClr val="222222"/>
+                </a:solidFill>
+                <a:latin typeface="맑은 고딕"/>
+              </a:rPr>
+              <a:t> — 운영 중 Primary에서 직접</a:t>
             </a:r>
           </a:p>
           <a:p>
@@ -7510,7 +7652,26 @@
                 </a:solidFill>
                 <a:latin typeface="맑은 고딕"/>
               </a:rPr>
-              <a:t>•  `DORECOVER` — 복제 후 그 시점까지 복구</a:t>
+              <a:t>•  </a:t>
+            </a:r>
+            <a:r>
+              <a:rPr sz="1700" b="0">
+                <a:solidFill>
+                  <a:srgbClr val="222222"/>
+                </a:solidFill>
+                <a:latin typeface="Consolas"/>
+                <a:cs typeface="Consolas"/>
+              </a:rPr>
+              <a:t>DORECOVER</a:t>
+            </a:r>
+            <a:r>
+              <a:rPr sz="1700" b="0">
+                <a:solidFill>
+                  <a:srgbClr val="222222"/>
+                </a:solidFill>
+                <a:latin typeface="맑은 고딕"/>
+              </a:rPr>
+              <a:t> — 복제 후 그 시점까지 복구</a:t>
             </a:r>
           </a:p>
           <a:p>
@@ -7526,7 +7687,26 @@
                 </a:solidFill>
                 <a:latin typeface="맑은 고딕"/>
               </a:rPr>
-              <a:t>•  `spfile` — Primary spfile을 고쳐 Standby용으로</a:t>
+              <a:t>•  </a:t>
+            </a:r>
+            <a:r>
+              <a:rPr sz="1700" b="0">
+                <a:solidFill>
+                  <a:srgbClr val="222222"/>
+                </a:solidFill>
+                <a:latin typeface="Consolas"/>
+                <a:cs typeface="Consolas"/>
+              </a:rPr>
+              <a:t>spfile</a:t>
+            </a:r>
+            <a:r>
+              <a:rPr sz="1700" b="0">
+                <a:solidFill>
+                  <a:srgbClr val="222222"/>
+                </a:solidFill>
+                <a:latin typeface="맑은 고딕"/>
+              </a:rPr>
+              <a:t> — Primary spfile을 고쳐 Standby용으로</a:t>
             </a:r>
           </a:p>
           <a:p>
@@ -7542,7 +7722,26 @@
                 </a:solidFill>
                 <a:latin typeface="맑은 고딕"/>
               </a:rPr>
-              <a:t>•  `nofilenamecheck` — 이름 충돌 검사 생략</a:t>
+              <a:t>•  </a:t>
+            </a:r>
+            <a:r>
+              <a:rPr sz="1700" b="0">
+                <a:solidFill>
+                  <a:srgbClr val="222222"/>
+                </a:solidFill>
+                <a:latin typeface="Consolas"/>
+                <a:cs typeface="Consolas"/>
+              </a:rPr>
+              <a:t>nofilenamecheck</a:t>
+            </a:r>
+            <a:r>
+              <a:rPr sz="1700" b="0">
+                <a:solidFill>
+                  <a:srgbClr val="222222"/>
+                </a:solidFill>
+                <a:latin typeface="맑은 고딕"/>
+              </a:rPr>
+              <a:t> — 이름 충돌 검사 생략</a:t>
             </a:r>
           </a:p>
         </p:txBody>
@@ -7721,7 +7920,26 @@
                 </a:solidFill>
                 <a:latin typeface="맑은 고딕"/>
               </a:rPr>
-              <a:t>•  `PARAMETER_VALUE_CONVERT 'chicago','boston'` — 값 안의 문자열 일괄 치환</a:t>
+              <a:t>•  </a:t>
+            </a:r>
+            <a:r>
+              <a:rPr sz="1700" b="0">
+                <a:solidFill>
+                  <a:srgbClr val="222222"/>
+                </a:solidFill>
+                <a:latin typeface="Consolas"/>
+                <a:cs typeface="Consolas"/>
+              </a:rPr>
+              <a:t>PARAMETER_VALUE_CONVERT 'chicago','boston'</a:t>
+            </a:r>
+            <a:r>
+              <a:rPr sz="1700" b="0">
+                <a:solidFill>
+                  <a:srgbClr val="222222"/>
+                </a:solidFill>
+                <a:latin typeface="맑은 고딕"/>
+              </a:rPr>
+              <a:t> — 값 안의 문자열 일괄 치환</a:t>
             </a:r>
           </a:p>
           <a:p>
@@ -7737,7 +7955,26 @@
                 </a:solidFill>
                 <a:latin typeface="맑은 고딕"/>
               </a:rPr>
-              <a:t>•  그 대상에 `db_name`의 값도 포함된다</a:t>
+              <a:t>•  그 대상에 </a:t>
+            </a:r>
+            <a:r>
+              <a:rPr sz="1700" b="0">
+                <a:solidFill>
+                  <a:srgbClr val="222222"/>
+                </a:solidFill>
+                <a:latin typeface="Consolas"/>
+                <a:cs typeface="Consolas"/>
+              </a:rPr>
+              <a:t>db_name</a:t>
+            </a:r>
+            <a:r>
+              <a:rPr sz="1700" b="0">
+                <a:solidFill>
+                  <a:srgbClr val="222222"/>
+                </a:solidFill>
+                <a:latin typeface="맑은 고딕"/>
+              </a:rPr>
+              <a:t>의 값도 포함된다</a:t>
             </a:r>
           </a:p>
           <a:p>
@@ -7769,7 +8006,16 @@
                 </a:solidFill>
                 <a:latin typeface="맑은 고딕"/>
               </a:rPr>
-              <a:t>•  둘이 겹치면 **SET이 이긴다**</a:t>
+              <a:t>•  둘이 겹치면 </a:t>
+            </a:r>
+            <a:r>
+              <a:rPr sz="1700" b="1">
+                <a:solidFill>
+                  <a:srgbClr val="222222"/>
+                </a:solidFill>
+                <a:latin typeface="맑은 고딕"/>
+              </a:rPr>
+              <a:t>SET이 이긴다</a:t>
             </a:r>
           </a:p>
         </p:txBody>
@@ -7948,7 +8194,36 @@
                 </a:solidFill>
                 <a:latin typeface="맑은 고딕"/>
               </a:rPr>
-              <a:t>•  `/u03/.../Chicago/` → `/u03/.../Boston/datafile/`</a:t>
+              <a:t>•  </a:t>
+            </a:r>
+            <a:r>
+              <a:rPr sz="1700" b="0">
+                <a:solidFill>
+                  <a:srgbClr val="222222"/>
+                </a:solidFill>
+                <a:latin typeface="Consolas"/>
+                <a:cs typeface="Consolas"/>
+              </a:rPr>
+              <a:t>/u03/.../Chicago/</a:t>
+            </a:r>
+            <a:r>
+              <a:rPr sz="1700" b="0">
+                <a:solidFill>
+                  <a:srgbClr val="222222"/>
+                </a:solidFill>
+                <a:latin typeface="맑은 고딕"/>
+              </a:rPr>
+              <a:t> → </a:t>
+            </a:r>
+            <a:r>
+              <a:rPr sz="1700" b="0">
+                <a:solidFill>
+                  <a:srgbClr val="222222"/>
+                </a:solidFill>
+                <a:latin typeface="Consolas"/>
+                <a:cs typeface="Consolas"/>
+              </a:rPr>
+              <a:t>/u03/.../Boston/datafile/</a:t>
             </a:r>
           </a:p>
           <a:p>
@@ -7964,7 +8239,36 @@
                 </a:solidFill>
                 <a:latin typeface="맑은 고딕"/>
               </a:rPr>
-              <a:t>•  `system01.dbf` → `Boston/datafile/system01.dbf`</a:t>
+              <a:t>•  </a:t>
+            </a:r>
+            <a:r>
+              <a:rPr sz="1700" b="0">
+                <a:solidFill>
+                  <a:srgbClr val="222222"/>
+                </a:solidFill>
+                <a:latin typeface="Consolas"/>
+                <a:cs typeface="Consolas"/>
+              </a:rPr>
+              <a:t>system01.dbf</a:t>
+            </a:r>
+            <a:r>
+              <a:rPr sz="1700" b="0">
+                <a:solidFill>
+                  <a:srgbClr val="222222"/>
+                </a:solidFill>
+                <a:latin typeface="맑은 고딕"/>
+              </a:rPr>
+              <a:t> → </a:t>
+            </a:r>
+            <a:r>
+              <a:rPr sz="1700" b="0">
+                <a:solidFill>
+                  <a:srgbClr val="222222"/>
+                </a:solidFill>
+                <a:latin typeface="Consolas"/>
+                <a:cs typeface="Consolas"/>
+              </a:rPr>
+              <a:t>Boston/datafile/system01.dbf</a:t>
             </a:r>
           </a:p>
           <a:p>
@@ -7980,7 +8284,36 @@
                 </a:solidFill>
                 <a:latin typeface="맑은 고딕"/>
               </a:rPr>
-              <a:t>•  `chicago_pdb1/users01.dbf` → `Boston/datafile/chicago_pdb1/users01.dbf`</a:t>
+              <a:t>•  </a:t>
+            </a:r>
+            <a:r>
+              <a:rPr sz="1700" b="0">
+                <a:solidFill>
+                  <a:srgbClr val="222222"/>
+                </a:solidFill>
+                <a:latin typeface="Consolas"/>
+                <a:cs typeface="Consolas"/>
+              </a:rPr>
+              <a:t>chicago_pdb1/users01.dbf</a:t>
+            </a:r>
+            <a:r>
+              <a:rPr sz="1700" b="0">
+                <a:solidFill>
+                  <a:srgbClr val="222222"/>
+                </a:solidFill>
+                <a:latin typeface="맑은 고딕"/>
+              </a:rPr>
+              <a:t> → </a:t>
+            </a:r>
+            <a:r>
+              <a:rPr sz="1700" b="0">
+                <a:solidFill>
+                  <a:srgbClr val="222222"/>
+                </a:solidFill>
+                <a:latin typeface="Consolas"/>
+                <a:cs typeface="Consolas"/>
+              </a:rPr>
+              <a:t>Boston/datafile/chicago_pdb1/users01.dbf</a:t>
             </a:r>
           </a:p>
           <a:p>
@@ -7996,7 +8329,17 @@
                 </a:solidFill>
                 <a:latin typeface="맑은 고딕"/>
               </a:rPr>
-              <a:t>•  로그는 목적지가 다르다 → `Boston/onlinelog/`</a:t>
+              <a:t>•  로그는 목적지가 다르다 → </a:t>
+            </a:r>
+            <a:r>
+              <a:rPr sz="1700" b="0">
+                <a:solidFill>
+                  <a:srgbClr val="222222"/>
+                </a:solidFill>
+                <a:latin typeface="Consolas"/>
+                <a:cs typeface="Consolas"/>
+              </a:rPr>
+              <a:t>Boston/onlinelog/</a:t>
             </a:r>
           </a:p>
         </p:txBody>
@@ -8391,7 +8734,26 @@
                 </a:solidFill>
                 <a:latin typeface="맑은 고딕"/>
               </a:rPr>
-              <a:t>•  `DUPLICATE ... FOR STANDBY FROM ACTIVE DATABASE`의 각 절이 무엇을 결정하는지 설명한다.</a:t>
+              <a:t>•  </a:t>
+            </a:r>
+            <a:r>
+              <a:rPr sz="1600" b="0">
+                <a:solidFill>
+                  <a:srgbClr val="222222"/>
+                </a:solidFill>
+                <a:latin typeface="Consolas"/>
+                <a:cs typeface="Consolas"/>
+              </a:rPr>
+              <a:t>DUPLICATE ... FOR STANDBY FROM ACTIVE DATABASE</a:t>
+            </a:r>
+            <a:r>
+              <a:rPr sz="1600" b="0">
+                <a:solidFill>
+                  <a:srgbClr val="222222"/>
+                </a:solidFill>
+                <a:latin typeface="맑은 고딕"/>
+              </a:rPr>
+              <a:t>의 각 절이 무엇을 결정하는지 설명한다.</a:t>
             </a:r>
           </a:p>
           <a:p>
@@ -8471,7 +8833,26 @@
                 </a:solidFill>
                 <a:latin typeface="맑은 고딕"/>
               </a:rPr>
-              <a:t>•  `DBMS_DBCOMP.DBCOMP`로 블록을 비교하고 보고서의 판정 열을 읽는다.</a:t>
+              <a:t>•  </a:t>
+            </a:r>
+            <a:r>
+              <a:rPr sz="1600" b="0">
+                <a:solidFill>
+                  <a:srgbClr val="222222"/>
+                </a:solidFill>
+                <a:latin typeface="Consolas"/>
+                <a:cs typeface="Consolas"/>
+              </a:rPr>
+              <a:t>DBMS_DBCOMP.DBCOMP</a:t>
+            </a:r>
+            <a:r>
+              <a:rPr sz="1600" b="0">
+                <a:solidFill>
+                  <a:srgbClr val="222222"/>
+                </a:solidFill>
+                <a:latin typeface="맑은 고딕"/>
+              </a:rPr>
+              <a:t>로 블록을 비교하고 보고서의 판정 열을 읽는다.</a:t>
             </a:r>
           </a:p>
           <a:p>
@@ -8666,7 +9047,17 @@
                 </a:solidFill>
                 <a:latin typeface="맑은 고딕"/>
               </a:rPr>
-              <a:t>•  경고 : `warning: implicitly using DB_FILE_NAME_CONVERT`</a:t>
+              <a:t>•  경고 : </a:t>
+            </a:r>
+            <a:r>
+              <a:rPr sz="1700" b="0">
+                <a:solidFill>
+                  <a:srgbClr val="222222"/>
+                </a:solidFill>
+                <a:latin typeface="Consolas"/>
+                <a:cs typeface="Consolas"/>
+              </a:rPr>
+              <a:t>warning: implicitly using DB_FILE_NAME_CONVERT</a:t>
             </a:r>
           </a:p>
           <a:p>
@@ -8682,7 +9073,17 @@
                 </a:solidFill>
                 <a:latin typeface="맑은 고딕"/>
               </a:rPr>
-              <a:t>•  오류 : `auxiliary file name ... conflicts with a file used by the target database`</a:t>
+              <a:t>•  오류 : </a:t>
+            </a:r>
+            <a:r>
+              <a:rPr sz="1700" b="0">
+                <a:solidFill>
+                  <a:srgbClr val="222222"/>
+                </a:solidFill>
+                <a:latin typeface="Consolas"/>
+                <a:cs typeface="Consolas"/>
+              </a:rPr>
+              <a:t>auxiliary file name ... conflicts with a file used by the target database</a:t>
             </a:r>
           </a:p>
           <a:p>
@@ -8698,7 +9099,25 @@
                 </a:solidFill>
                 <a:latin typeface="맑은 고딕"/>
               </a:rPr>
-              <a:t>•  경로가 **Chicago**다 — 변환이 전혀 없었다</a:t>
+              <a:t>•  경로가 </a:t>
+            </a:r>
+            <a:r>
+              <a:rPr sz="1700" b="1">
+                <a:solidFill>
+                  <a:srgbClr val="222222"/>
+                </a:solidFill>
+                <a:latin typeface="맑은 고딕"/>
+              </a:rPr>
+              <a:t>Chicago</a:t>
+            </a:r>
+            <a:r>
+              <a:rPr sz="1700" b="0">
+                <a:solidFill>
+                  <a:srgbClr val="222222"/>
+                </a:solidFill>
+                <a:latin typeface="맑은 고딕"/>
+              </a:rPr>
+              <a:t>다 — 변환이 전혀 없었다</a:t>
             </a:r>
           </a:p>
           <a:p>
@@ -8925,7 +9344,16 @@
                 </a:solidFill>
                 <a:latin typeface="맑은 고딕"/>
               </a:rPr>
-              <a:t>•  결과 : **Primary 데이터 파일을 실제로 덮어쓴다**</a:t>
+              <a:t>•  결과 : </a:t>
+            </a:r>
+            <a:r>
+              <a:rPr sz="1700" b="1">
+                <a:solidFill>
+                  <a:srgbClr val="222222"/>
+                </a:solidFill>
+                <a:latin typeface="맑은 고딕"/>
+              </a:rPr>
+              <a:t>Primary 데이터 파일을 실제로 덮어쓴다</a:t>
             </a:r>
           </a:p>
           <a:p>
@@ -9152,7 +9580,26 @@
                 </a:solidFill>
                 <a:latin typeface="맑은 고딕"/>
               </a:rPr>
-              <a:t>•  6번(`pdbseed/sysaux01.dbf`)에서 멈췄다</a:t>
+              <a:t>•  6번(</a:t>
+            </a:r>
+            <a:r>
+              <a:rPr sz="1700" b="0">
+                <a:solidFill>
+                  <a:srgbClr val="222222"/>
+                </a:solidFill>
+                <a:latin typeface="Consolas"/>
+                <a:cs typeface="Consolas"/>
+              </a:rPr>
+              <a:t>pdbseed/sysaux01.dbf</a:t>
+            </a:r>
+            <a:r>
+              <a:rPr sz="1700" b="0">
+                <a:solidFill>
+                  <a:srgbClr val="222222"/>
+                </a:solidFill>
+                <a:latin typeface="맑은 고딕"/>
+              </a:rPr>
+              <a:t>)에서 멈췄다</a:t>
             </a:r>
           </a:p>
           <a:p>
@@ -9168,7 +9615,25 @@
                 </a:solidFill>
                 <a:latin typeface="맑은 고딕"/>
               </a:rPr>
-              <a:t>•  공통점 : 실패한 파일은 **하위 디렉터리 아래** 있다</a:t>
+              <a:t>•  공통점 : 실패한 파일은 </a:t>
+            </a:r>
+            <a:r>
+              <a:rPr sz="1700" b="1">
+                <a:solidFill>
+                  <a:srgbClr val="222222"/>
+                </a:solidFill>
+                <a:latin typeface="맑은 고딕"/>
+              </a:rPr>
+              <a:t>하위 디렉터리 아래</a:t>
+            </a:r>
+            <a:r>
+              <a:rPr sz="1700" b="0">
+                <a:solidFill>
+                  <a:srgbClr val="222222"/>
+                </a:solidFill>
+                <a:latin typeface="맑은 고딕"/>
+              </a:rPr>
+              <a:t> 있다</a:t>
             </a:r>
           </a:p>
         </p:txBody>
@@ -9306,9 +9771,10 @@
                 <a:solidFill>
                   <a:srgbClr val="5A6672"/>
                 </a:solidFill>
-                <a:latin typeface="맑은 고딕"/>
-              </a:rPr>
-              <a:t>`failed to identify file ""`</a:t>
+                <a:latin typeface="Consolas"/>
+                <a:cs typeface="Consolas"/>
+              </a:rPr>
+              <a:t>failed to identify file ""</a:t>
             </a:r>
           </a:p>
         </p:txBody>
@@ -9363,7 +9829,25 @@
                 </a:solidFill>
                 <a:latin typeface="맑은 고딕"/>
               </a:rPr>
-              <a:t>•  해법 : 로그에서 **바로 앞의 input datafile 줄**을 본다</a:t>
+              <a:t>•  해법 : 로그에서 </a:t>
+            </a:r>
+            <a:r>
+              <a:rPr sz="1700" b="1">
+                <a:solidFill>
+                  <a:srgbClr val="222222"/>
+                </a:solidFill>
+                <a:latin typeface="맑은 고딕"/>
+              </a:rPr>
+              <a:t>바로 앞의 input datafile 줄</a:t>
+            </a:r>
+            <a:r>
+              <a:rPr sz="1700" b="0">
+                <a:solidFill>
+                  <a:srgbClr val="222222"/>
+                </a:solidFill>
+                <a:latin typeface="맑은 고딕"/>
+              </a:rPr>
+              <a:t>을 본다</a:t>
             </a:r>
           </a:p>
           <a:p>
@@ -9379,7 +9863,17 @@
                 </a:solidFill>
                 <a:latin typeface="맑은 고딕"/>
               </a:rPr>
-              <a:t>•  286번 줄 : `input datafile file number=00006 ... pdbseed/sysaux01.dbf`</a:t>
+              <a:t>•  286번 줄 : </a:t>
+            </a:r>
+            <a:r>
+              <a:rPr sz="1700" b="0">
+                <a:solidFill>
+                  <a:srgbClr val="222222"/>
+                </a:solidFill>
+                <a:latin typeface="Consolas"/>
+                <a:cs typeface="Consolas"/>
+              </a:rPr>
+              <a:t>input datafile file number=00006 ... pdbseed/sysaux01.dbf</a:t>
             </a:r>
           </a:p>
           <a:p>
@@ -9590,7 +10084,25 @@
                 </a:solidFill>
                 <a:latin typeface="맑은 고딕"/>
               </a:rPr>
-              <a:t>•  ORA-17628 — 방향. **원격(Standby) 쪽** 오류다</a:t>
+              <a:t>•  ORA-17628 — 방향. </a:t>
+            </a:r>
+            <a:r>
+              <a:rPr sz="1700" b="1">
+                <a:solidFill>
+                  <a:srgbClr val="222222"/>
+                </a:solidFill>
+                <a:latin typeface="맑은 고딕"/>
+              </a:rPr>
+              <a:t>원격(Standby) 쪽</a:t>
+            </a:r>
+            <a:r>
+              <a:rPr sz="1700" b="0">
+                <a:solidFill>
+                  <a:srgbClr val="222222"/>
+                </a:solidFill>
+                <a:latin typeface="맑은 고딕"/>
+              </a:rPr>
+              <a:t> 오류다</a:t>
             </a:r>
           </a:p>
           <a:p>
@@ -9801,7 +10313,25 @@
                 </a:solidFill>
                 <a:latin typeface="맑은 고딕"/>
               </a:rPr>
-              <a:t>•  첫 번째 : 전송 **전**에 막힘 — 남은 파일 없음</a:t>
+              <a:t>•  첫 번째 : 전송 </a:t>
+            </a:r>
+            <a:r>
+              <a:rPr sz="1700" b="1">
+                <a:solidFill>
+                  <a:srgbClr val="222222"/>
+                </a:solidFill>
+                <a:latin typeface="맑은 고딕"/>
+              </a:rPr>
+              <a:t>전</a:t>
+            </a:r>
+            <a:r>
+              <a:rPr sz="1700" b="0">
+                <a:solidFill>
+                  <a:srgbClr val="222222"/>
+                </a:solidFill>
+                <a:latin typeface="맑은 고딕"/>
+              </a:rPr>
+              <a:t>에 막힘 — 남은 파일 없음</a:t>
             </a:r>
           </a:p>
           <a:p>
@@ -9817,7 +10347,25 @@
                 </a:solidFill>
                 <a:latin typeface="맑은 고딕"/>
               </a:rPr>
-              <a:t>•  두 번째 : 전송 **도중** 막힘 — 일부 파일이 남는다</a:t>
+              <a:t>•  두 번째 : 전송 </a:t>
+            </a:r>
+            <a:r>
+              <a:rPr sz="1700" b="1">
+                <a:solidFill>
+                  <a:srgbClr val="222222"/>
+                </a:solidFill>
+                <a:latin typeface="맑은 고딕"/>
+              </a:rPr>
+              <a:t>도중</a:t>
+            </a:r>
+            <a:r>
+              <a:rPr sz="1700" b="0">
+                <a:solidFill>
+                  <a:srgbClr val="222222"/>
+                </a:solidFill>
+                <a:latin typeface="맑은 고딕"/>
+              </a:rPr>
+              <a:t> 막힘 — 일부 파일이 남는다</a:t>
             </a:r>
           </a:p>
           <a:p>
@@ -10283,7 +10831,26 @@
                 </a:solidFill>
                 <a:latin typeface="맑은 고딕"/>
               </a:rPr>
-              <a:t>•  `rc=0` — 종료 코드</a:t>
+              <a:t>•  </a:t>
+            </a:r>
+            <a:r>
+              <a:rPr sz="1700" b="0">
+                <a:solidFill>
+                  <a:srgbClr val="222222"/>
+                </a:solidFill>
+                <a:latin typeface="Consolas"/>
+                <a:cs typeface="Consolas"/>
+              </a:rPr>
+              <a:t>rc=0</a:t>
+            </a:r>
+            <a:r>
+              <a:rPr sz="1700" b="0">
+                <a:solidFill>
+                  <a:srgbClr val="222222"/>
+                </a:solidFill>
+                <a:latin typeface="맑은 고딕"/>
+              </a:rPr>
+              <a:t> — 종료 코드</a:t>
             </a:r>
           </a:p>
           <a:p>
@@ -10299,7 +10866,35 @@
                 </a:solidFill>
                 <a:latin typeface="맑은 고딕"/>
               </a:rPr>
-              <a:t>•  `grep -cE 'RMAN-|ORA-'` = **0**</a:t>
+              <a:t>•  </a:t>
+            </a:r>
+            <a:r>
+              <a:rPr sz="1700" b="0">
+                <a:solidFill>
+                  <a:srgbClr val="222222"/>
+                </a:solidFill>
+                <a:latin typeface="Consolas"/>
+                <a:cs typeface="Consolas"/>
+              </a:rPr>
+              <a:t>grep -cE 'RMAN-|ORA-'</a:t>
+            </a:r>
+            <a:r>
+              <a:rPr sz="1700" b="0">
+                <a:solidFill>
+                  <a:srgbClr val="222222"/>
+                </a:solidFill>
+                <a:latin typeface="맑은 고딕"/>
+              </a:rPr>
+              <a:t> = </a:t>
+            </a:r>
+            <a:r>
+              <a:rPr sz="1700" b="1">
+                <a:solidFill>
+                  <a:srgbClr val="222222"/>
+                </a:solidFill>
+                <a:latin typeface="맑은 고딕"/>
+              </a:rPr>
+              <a:t>0</a:t>
             </a:r>
           </a:p>
           <a:p>
@@ -10315,7 +10910,26 @@
                 </a:solidFill>
                 <a:latin typeface="맑은 고딕"/>
               </a:rPr>
-              <a:t>•  `Finished Duplicate Db` 존재</a:t>
+              <a:t>•  </a:t>
+            </a:r>
+            <a:r>
+              <a:rPr sz="1700" b="0">
+                <a:solidFill>
+                  <a:srgbClr val="222222"/>
+                </a:solidFill>
+                <a:latin typeface="Consolas"/>
+                <a:cs typeface="Consolas"/>
+              </a:rPr>
+              <a:t>Finished Duplicate Db</a:t>
+            </a:r>
+            <a:r>
+              <a:rPr sz="1700" b="0">
+                <a:solidFill>
+                  <a:srgbClr val="222222"/>
+                </a:solidFill>
+                <a:latin typeface="맑은 고딕"/>
+              </a:rPr>
+              <a:t> 존재</a:t>
             </a:r>
           </a:p>
           <a:p>
@@ -10753,7 +11367,17 @@
                 </a:solidFill>
                 <a:latin typeface="맑은 고딕"/>
               </a:rPr>
-              <a:t>•  로그 끝 : `sql statement: alter database recover managed standby database ...`</a:t>
+              <a:t>•  로그 끝 : </a:t>
+            </a:r>
+            <a:r>
+              <a:rPr sz="1700" b="0">
+                <a:solidFill>
+                  <a:srgbClr val="222222"/>
+                </a:solidFill>
+                <a:latin typeface="Consolas"/>
+                <a:cs typeface="Consolas"/>
+              </a:rPr>
+              <a:t>sql statement: alter database recover managed standby database ...</a:t>
             </a:r>
           </a:p>
           <a:p>
@@ -11503,7 +12127,16 @@
                 </a:solidFill>
                 <a:latin typeface="맑은 고딕"/>
               </a:rPr>
-              <a:t>•  그러나 OPEN_MODE는 **MOUNTED**</a:t>
+              <a:t>•  그러나 OPEN_MODE는 </a:t>
+            </a:r>
+            <a:r>
+              <a:rPr sz="1700" b="1">
+                <a:solidFill>
+                  <a:srgbClr val="222222"/>
+                </a:solidFill>
+                <a:latin typeface="맑은 고딕"/>
+              </a:rPr>
+              <a:t>MOUNTED</a:t>
             </a:r>
           </a:p>
           <a:p>
@@ -11714,7 +12347,35 @@
                 </a:solidFill>
                 <a:latin typeface="맑은 고딕"/>
               </a:rPr>
-              <a:t>•  `CREATE SPFILE FROM MEMORY` → **ORA-32002**</a:t>
+              <a:t>•  </a:t>
+            </a:r>
+            <a:r>
+              <a:rPr sz="1700" b="0">
+                <a:solidFill>
+                  <a:srgbClr val="222222"/>
+                </a:solidFill>
+                <a:latin typeface="Consolas"/>
+                <a:cs typeface="Consolas"/>
+              </a:rPr>
+              <a:t>CREATE SPFILE FROM MEMORY</a:t>
+            </a:r>
+            <a:r>
+              <a:rPr sz="1700" b="0">
+                <a:solidFill>
+                  <a:srgbClr val="222222"/>
+                </a:solidFill>
+                <a:latin typeface="맑은 고딕"/>
+              </a:rPr>
+              <a:t> → </a:t>
+            </a:r>
+            <a:r>
+              <a:rPr sz="1700" b="1">
+                <a:solidFill>
+                  <a:srgbClr val="222222"/>
+                </a:solidFill>
+                <a:latin typeface="맑은 고딕"/>
+              </a:rPr>
+              <a:t>ORA-32002</a:t>
             </a:r>
           </a:p>
           <a:p>
@@ -11746,7 +12407,35 @@
                 </a:solidFill>
                 <a:latin typeface="맑은 고딕"/>
               </a:rPr>
-              <a:t>•  가이드에 `ALTER PLUGGABLE DATABASE ... OPEN READ ONLY`가 **없다**</a:t>
+              <a:t>•  가이드에 </a:t>
+            </a:r>
+            <a:r>
+              <a:rPr sz="1700" b="0">
+                <a:solidFill>
+                  <a:srgbClr val="222222"/>
+                </a:solidFill>
+                <a:latin typeface="Consolas"/>
+                <a:cs typeface="Consolas"/>
+              </a:rPr>
+              <a:t>ALTER PLUGGABLE DATABASE ... OPEN READ ONLY</a:t>
+            </a:r>
+            <a:r>
+              <a:rPr sz="1700" b="0">
+                <a:solidFill>
+                  <a:srgbClr val="222222"/>
+                </a:solidFill>
+                <a:latin typeface="맑은 고딕"/>
+              </a:rPr>
+              <a:t>가 </a:t>
+            </a:r>
+            <a:r>
+              <a:rPr sz="1700" b="1">
+                <a:solidFill>
+                  <a:srgbClr val="222222"/>
+                </a:solidFill>
+                <a:latin typeface="맑은 고딕"/>
+              </a:rPr>
+              <a:t>없다</a:t>
             </a:r>
           </a:p>
           <a:p>
@@ -12168,7 +12857,17 @@
                 </a:solidFill>
                 <a:latin typeface="맑은 고딕"/>
               </a:rPr>
-              <a:t>•  Primary에서 `ALTER SYSTEM ARCHIVE LOG CURRENT`</a:t>
+              <a:t>•  Primary에서 </a:t>
+            </a:r>
+            <a:r>
+              <a:rPr sz="1700" b="0">
+                <a:solidFill>
+                  <a:srgbClr val="222222"/>
+                </a:solidFill>
+                <a:latin typeface="Consolas"/>
+                <a:cs typeface="Consolas"/>
+              </a:rPr>
+              <a:t>ALTER SYSTEM ARCHIVE LOG CURRENT</a:t>
             </a:r>
           </a:p>
           <a:p>
@@ -12184,7 +12883,17 @@
                 </a:solidFill>
                 <a:latin typeface="맑은 고딕"/>
               </a:rPr>
-              <a:t>•  transport lag / apply lag = `+00 00:00:00`</a:t>
+              <a:t>•  transport lag / apply lag = </a:t>
+            </a:r>
+            <a:r>
+              <a:rPr sz="1700" b="0">
+                <a:solidFill>
+                  <a:srgbClr val="222222"/>
+                </a:solidFill>
+                <a:latin typeface="Consolas"/>
+                <a:cs typeface="Consolas"/>
+              </a:rPr>
+              <a:t>+00 00:00:00</a:t>
             </a:r>
           </a:p>
           <a:p>
@@ -12200,7 +12909,16 @@
                 </a:solidFill>
                 <a:latin typeface="맑은 고딕"/>
               </a:rPr>
-              <a:t>•  MRP0 상태가 WAIT_FOR_LOG → **APPLYING_LOG**</a:t>
+              <a:t>•  MRP0 상태가 WAIT_FOR_LOG → </a:t>
+            </a:r>
+            <a:r>
+              <a:rPr sz="1700" b="1">
+                <a:solidFill>
+                  <a:srgbClr val="222222"/>
+                </a:solidFill>
+                <a:latin typeface="맑은 고딕"/>
+              </a:rPr>
+              <a:t>APPLYING_LOG</a:t>
             </a:r>
           </a:p>
           <a:p>
@@ -12666,7 +13384,26 @@
                 </a:solidFill>
                 <a:latin typeface="맑은 고딕"/>
               </a:rPr>
-              <a:t>•  `DBMS_DBCOMP.DBCOMP`는 데이터 블록을 하나씩 비교한다</a:t>
+              <a:t>•  </a:t>
+            </a:r>
+            <a:r>
+              <a:rPr sz="1700" b="0">
+                <a:solidFill>
+                  <a:srgbClr val="222222"/>
+                </a:solidFill>
+                <a:latin typeface="Consolas"/>
+                <a:cs typeface="Consolas"/>
+              </a:rPr>
+              <a:t>DBMS_DBCOMP.DBCOMP</a:t>
+            </a:r>
+            <a:r>
+              <a:rPr sz="1700" b="0">
+                <a:solidFill>
+                  <a:srgbClr val="222222"/>
+                </a:solidFill>
+                <a:latin typeface="맑은 고딕"/>
+              </a:rPr>
+              <a:t>는 데이터 블록을 하나씩 비교한다</a:t>
             </a:r>
           </a:p>
           <a:p>
@@ -12877,7 +13614,26 @@
                 </a:solidFill>
                 <a:latin typeface="맑은 고딕"/>
               </a:rPr>
-              <a:t>•  이름은 `output_file` — 디렉터리 객체를 넣고 싶어진다</a:t>
+              <a:t>•  이름은 </a:t>
+            </a:r>
+            <a:r>
+              <a:rPr sz="1700" b="0">
+                <a:solidFill>
+                  <a:srgbClr val="222222"/>
+                </a:solidFill>
+                <a:latin typeface="Consolas"/>
+                <a:cs typeface="Consolas"/>
+              </a:rPr>
+              <a:t>output_file</a:t>
+            </a:r>
+            <a:r>
+              <a:rPr sz="1700" b="0">
+                <a:solidFill>
+                  <a:srgbClr val="222222"/>
+                </a:solidFill>
+                <a:latin typeface="맑은 고딕"/>
+              </a:rPr>
+              <a:t> — 디렉터리 객체를 넣고 싶어진다</a:t>
             </a:r>
           </a:p>
           <a:p>
@@ -12893,7 +13649,16 @@
                 </a:solidFill>
                 <a:latin typeface="맑은 고딕"/>
               </a:rPr>
-              <a:t>•  실제로는 **파일 이름 접두어**</a:t>
+              <a:t>•  실제로는 </a:t>
+            </a:r>
+            <a:r>
+              <a:rPr sz="1700" b="1">
+                <a:solidFill>
+                  <a:srgbClr val="222222"/>
+                </a:solidFill>
+                <a:latin typeface="맑은 고딕"/>
+              </a:rPr>
+              <a:t>파일 이름 접두어</a:t>
             </a:r>
           </a:p>
           <a:p>
@@ -12909,7 +13674,26 @@
                 </a:solidFill>
                 <a:latin typeface="맑은 고딕"/>
               </a:rPr>
-              <a:t>•  결과는 `$ORACLE_HOME/dbs` 아래에 생긴다</a:t>
+              <a:t>•  결과는 </a:t>
+            </a:r>
+            <a:r>
+              <a:rPr sz="1700" b="0">
+                <a:solidFill>
+                  <a:srgbClr val="222222"/>
+                </a:solidFill>
+                <a:latin typeface="Consolas"/>
+                <a:cs typeface="Consolas"/>
+              </a:rPr>
+              <a:t>$ORACLE_HOME/dbs</a:t>
+            </a:r>
+            <a:r>
+              <a:rPr sz="1700" b="0">
+                <a:solidFill>
+                  <a:srgbClr val="222222"/>
+                </a:solidFill>
+                <a:latin typeface="맑은 고딕"/>
+              </a:rPr>
+              <a:t> 아래에 생긴다</a:t>
             </a:r>
           </a:p>
           <a:p>
@@ -12925,7 +13709,36 @@
                 </a:solidFill>
                 <a:latin typeface="맑은 고딕"/>
               </a:rPr>
-              <a:t>•  `&lt;접두어&gt;` 와 `&lt;접두어&gt;_&lt;상대 DB_UNIQUE_NAME&gt;_&lt;파일번호&gt;`</a:t>
+              <a:t>•  </a:t>
+            </a:r>
+            <a:r>
+              <a:rPr sz="1700" b="0">
+                <a:solidFill>
+                  <a:srgbClr val="222222"/>
+                </a:solidFill>
+                <a:latin typeface="Consolas"/>
+                <a:cs typeface="Consolas"/>
+              </a:rPr>
+              <a:t>&lt;접두어&gt;</a:t>
+            </a:r>
+            <a:r>
+              <a:rPr sz="1700" b="0">
+                <a:solidFill>
+                  <a:srgbClr val="222222"/>
+                </a:solidFill>
+                <a:latin typeface="맑은 고딕"/>
+              </a:rPr>
+              <a:t> 와 </a:t>
+            </a:r>
+            <a:r>
+              <a:rPr sz="1700" b="0">
+                <a:solidFill>
+                  <a:srgbClr val="222222"/>
+                </a:solidFill>
+                <a:latin typeface="Consolas"/>
+                <a:cs typeface="Consolas"/>
+              </a:rPr>
+              <a:t>&lt;접두어&gt;_&lt;상대 DB_UNIQUE_NAME&gt;_&lt;파일번호&gt;</a:t>
             </a:r>
           </a:p>
         </p:txBody>
@@ -13104,7 +13917,25 @@
                 </a:solidFill>
                 <a:latin typeface="맑은 고딕"/>
               </a:rPr>
-              <a:t>•  같은 접두어 재사용 → **ORA-24258** (덮어쓰지 않는다)</a:t>
+              <a:t>•  같은 접두어 재사용 → </a:t>
+            </a:r>
+            <a:r>
+              <a:rPr sz="1700" b="1">
+                <a:solidFill>
+                  <a:srgbClr val="222222"/>
+                </a:solidFill>
+                <a:latin typeface="맑은 고딕"/>
+              </a:rPr>
+              <a:t>ORA-24258</a:t>
+            </a:r>
+            <a:r>
+              <a:rPr sz="1700" b="0">
+                <a:solidFill>
+                  <a:srgbClr val="222222"/>
+                </a:solidFill>
+                <a:latin typeface="맑은 고딕"/>
+              </a:rPr>
+              <a:t> (덮어쓰지 않는다)</a:t>
             </a:r>
           </a:p>
           <a:p>
@@ -13120,7 +13951,25 @@
                 </a:solidFill>
                 <a:latin typeface="맑은 고딕"/>
               </a:rPr>
-              <a:t>•  NULL이나 없는 파일 → **ORA-53201** (한 번에 한 파일만)</a:t>
+              <a:t>•  NULL이나 없는 파일 → </a:t>
+            </a:r>
+            <a:r>
+              <a:rPr sz="1700" b="1">
+                <a:solidFill>
+                  <a:srgbClr val="222222"/>
+                </a:solidFill>
+                <a:latin typeface="맑은 고딕"/>
+              </a:rPr>
+              <a:t>ORA-53201</a:t>
+            </a:r>
+            <a:r>
+              <a:rPr sz="1700" b="0">
+                <a:solidFill>
+                  <a:srgbClr val="222222"/>
+                </a:solidFill>
+                <a:latin typeface="맑은 고딕"/>
+              </a:rPr>
+              <a:t> (한 번에 한 파일만)</a:t>
             </a:r>
           </a:p>
           <a:p>
@@ -13136,7 +13985,16 @@
                 </a:solidFill>
                 <a:latin typeface="맑은 고딕"/>
               </a:rPr>
-              <a:t>•  없는 디렉터리 객체 이름 → **오류 없이 성공**</a:t>
+              <a:t>•  없는 디렉터리 객체 이름 → </a:t>
+            </a:r>
+            <a:r>
+              <a:rPr sz="1700" b="1">
+                <a:solidFill>
+                  <a:srgbClr val="222222"/>
+                </a:solidFill>
+                <a:latin typeface="맑은 고딕"/>
+              </a:rPr>
+              <a:t>오류 없이 성공</a:t>
             </a:r>
           </a:p>
         </p:txBody>
@@ -13315,7 +14173,25 @@
                 </a:solidFill>
                 <a:latin typeface="맑은 고딕"/>
               </a:rPr>
-              <a:t>•  **DIFFPAIR** : 버전은 같은데 내용이 다르다 — 있을 수 없는 상태</a:t>
+              <a:t>•  </a:t>
+            </a:r>
+            <a:r>
+              <a:rPr sz="1700" b="1">
+                <a:solidFill>
+                  <a:srgbClr val="222222"/>
+                </a:solidFill>
+                <a:latin typeface="맑은 고딕"/>
+              </a:rPr>
+              <a:t>DIFFPAIR</a:t>
+            </a:r>
+            <a:r>
+              <a:rPr sz="1700" b="0">
+                <a:solidFill>
+                  <a:srgbClr val="222222"/>
+                </a:solidFill>
+                <a:latin typeface="맑은 고딕"/>
+              </a:rPr>
+              <a:t> : 버전은 같은데 내용이 다르다 — 있을 수 없는 상태</a:t>
             </a:r>
           </a:p>
           <a:p>
@@ -13331,7 +14207,25 @@
                 </a:solidFill>
                 <a:latin typeface="맑은 고딕"/>
               </a:rPr>
-              <a:t>•  **LWLOC / LWRMT** : 로컬·원격의 lost write</a:t>
+              <a:t>•  </a:t>
+            </a:r>
+            <a:r>
+              <a:rPr sz="1700" b="1">
+                <a:solidFill>
+                  <a:srgbClr val="222222"/>
+                </a:solidFill>
+                <a:latin typeface="맑은 고딕"/>
+              </a:rPr>
+              <a:t>LWLOC / LWRMT</a:t>
+            </a:r>
+            <a:r>
+              <a:rPr sz="1700" b="0">
+                <a:solidFill>
+                  <a:srgbClr val="222222"/>
+                </a:solidFill>
+                <a:latin typeface="맑은 고딕"/>
+              </a:rPr>
+              <a:t> : 로컬·원격의 lost write</a:t>
             </a:r>
           </a:p>
           <a:p>
@@ -13845,7 +14739,16 @@
                 </a:solidFill>
                 <a:latin typeface="맑은 고딕"/>
               </a:rPr>
-              <a:t>•  CORR가 잡히면 **재실행과 RMAN VALIDATE로 교차 확인**</a:t>
+              <a:t>•  CORR가 잡히면 </a:t>
+            </a:r>
+            <a:r>
+              <a:rPr sz="1700" b="1">
+                <a:solidFill>
+                  <a:srgbClr val="222222"/>
+                </a:solidFill>
+                <a:latin typeface="맑은 고딕"/>
+              </a:rPr>
+              <a:t>재실행과 RMAN VALIDATE로 교차 확인</a:t>
             </a:r>
           </a:p>
         </p:txBody>
@@ -14327,7 +15230,26 @@
                 </a:solidFill>
                 <a:latin typeface="맑은 고딕"/>
               </a:rPr>
-              <a:t>•  6장 OMF : `DB_CREATE_FILE_DEST` 하나면 끝난다</a:t>
+              <a:t>•  6장 OMF : </a:t>
+            </a:r>
+            <a:r>
+              <a:rPr sz="1700" b="0">
+                <a:solidFill>
+                  <a:srgbClr val="222222"/>
+                </a:solidFill>
+                <a:latin typeface="Consolas"/>
+                <a:cs typeface="Consolas"/>
+              </a:rPr>
+              <a:t>DB_CREATE_FILE_DEST</a:t>
+            </a:r>
+            <a:r>
+              <a:rPr sz="1700" b="0">
+                <a:solidFill>
+                  <a:srgbClr val="222222"/>
+                </a:solidFill>
+                <a:latin typeface="맑은 고딕"/>
+              </a:rPr>
+              <a:t> 하나면 끝난다</a:t>
             </a:r>
           </a:p>
         </p:txBody>
@@ -14467,7 +15389,26 @@
                 </a:solidFill>
                 <a:latin typeface="맑은 고딕"/>
               </a:rPr>
-              <a:t>•  Q1. `FOR STANDBY`가 없으면 무엇이 달라지며, 그것이 왜 Data Guard에 치명적인가?</a:t>
+              <a:t>•  Q1. </a:t>
+            </a:r>
+            <a:r>
+              <a:rPr sz="1600" b="0">
+                <a:solidFill>
+                  <a:srgbClr val="222222"/>
+                </a:solidFill>
+                <a:latin typeface="Consolas"/>
+                <a:cs typeface="Consolas"/>
+              </a:rPr>
+              <a:t>FOR STANDBY</a:t>
+            </a:r>
+            <a:r>
+              <a:rPr sz="1600" b="0">
+                <a:solidFill>
+                  <a:srgbClr val="222222"/>
+                </a:solidFill>
+                <a:latin typeface="맑은 고딕"/>
+              </a:rPr>
+              <a:t>가 없으면 무엇이 달라지며, 그것이 왜 Data Guard에 치명적인가?</a:t>
             </a:r>
           </a:p>
           <a:p>
@@ -14499,7 +15440,45 @@
                 </a:solidFill>
                 <a:latin typeface="맑은 고딕"/>
               </a:rPr>
-              <a:t>•  Q3. `RMAN-05538` 경고가 뜨고 `RMAN-05001`의 경로가 Chicago였다. 무엇이 잘못되었는가?</a:t>
+              <a:t>•  Q3. </a:t>
+            </a:r>
+            <a:r>
+              <a:rPr sz="1600" b="0">
+                <a:solidFill>
+                  <a:srgbClr val="222222"/>
+                </a:solidFill>
+                <a:latin typeface="Consolas"/>
+                <a:cs typeface="Consolas"/>
+              </a:rPr>
+              <a:t>RMAN-05538</a:t>
+            </a:r>
+            <a:r>
+              <a:rPr sz="1600" b="0">
+                <a:solidFill>
+                  <a:srgbClr val="222222"/>
+                </a:solidFill>
+                <a:latin typeface="맑은 고딕"/>
+              </a:rPr>
+              <a:t> 경고가 뜨고 </a:t>
+            </a:r>
+            <a:r>
+              <a:rPr sz="1600" b="0">
+                <a:solidFill>
+                  <a:srgbClr val="222222"/>
+                </a:solidFill>
+                <a:latin typeface="Consolas"/>
+                <a:cs typeface="Consolas"/>
+              </a:rPr>
+              <a:t>RMAN-05001</a:t>
+            </a:r>
+            <a:r>
+              <a:rPr sz="1600" b="0">
+                <a:solidFill>
+                  <a:srgbClr val="222222"/>
+                </a:solidFill>
+                <a:latin typeface="맑은 고딕"/>
+              </a:rPr>
+              <a:t>의 경로가 Chicago였다. 무엇이 잘못되었는가?</a:t>
             </a:r>
           </a:p>
           <a:p>
@@ -14515,7 +15494,26 @@
                 </a:solidFill>
                 <a:latin typeface="맑은 고딕"/>
               </a:rPr>
-              <a:t>•  Q4. `NOFILENAMECHECK`를 convert 없이 단독으로 쓰면 왜 위험한가?</a:t>
+              <a:t>•  Q4. </a:t>
+            </a:r>
+            <a:r>
+              <a:rPr sz="1600" b="0">
+                <a:solidFill>
+                  <a:srgbClr val="222222"/>
+                </a:solidFill>
+                <a:latin typeface="Consolas"/>
+                <a:cs typeface="Consolas"/>
+              </a:rPr>
+              <a:t>NOFILENAMECHECK</a:t>
+            </a:r>
+            <a:r>
+              <a:rPr sz="1600" b="0">
+                <a:solidFill>
+                  <a:srgbClr val="222222"/>
+                </a:solidFill>
+                <a:latin typeface="맑은 고딕"/>
+              </a:rPr>
+              <a:t>를 convert 없이 단독으로 쓰면 왜 위험한가?</a:t>
             </a:r>
           </a:p>
           <a:p>
@@ -14531,7 +15529,26 @@
                 </a:solidFill>
                 <a:latin typeface="맑은 고딕"/>
               </a:rPr>
-              <a:t>•  Q5. `ORA-19505`의 파일 이름이 비어 있을 때 원인을 어떻게 특정하는가?</a:t>
+              <a:t>•  Q5. </a:t>
+            </a:r>
+            <a:r>
+              <a:rPr sz="1600" b="0">
+                <a:solidFill>
+                  <a:srgbClr val="222222"/>
+                </a:solidFill>
+                <a:latin typeface="Consolas"/>
+                <a:cs typeface="Consolas"/>
+              </a:rPr>
+              <a:t>ORA-19505</a:t>
+            </a:r>
+            <a:r>
+              <a:rPr sz="1600" b="0">
+                <a:solidFill>
+                  <a:srgbClr val="222222"/>
+                </a:solidFill>
+                <a:latin typeface="맑은 고딕"/>
+              </a:rPr>
+              <a:t>의 파일 이름이 비어 있을 때 원인을 어떻게 특정하는가?</a:t>
             </a:r>
           </a:p>
           <a:p>
@@ -14547,7 +15564,26 @@
                 </a:solidFill>
                 <a:latin typeface="맑은 고딕"/>
               </a:rPr>
-              <a:t>•  Q6. `DBMS_DBCOMP` 보고서에서 정상 여부를 판정하는 세 열은 무엇이며 왜 그 셋인가?</a:t>
+              <a:t>•  Q6. </a:t>
+            </a:r>
+            <a:r>
+              <a:rPr sz="1600" b="0">
+                <a:solidFill>
+                  <a:srgbClr val="222222"/>
+                </a:solidFill>
+                <a:latin typeface="Consolas"/>
+                <a:cs typeface="Consolas"/>
+              </a:rPr>
+              <a:t>DBMS_DBCOMP</a:t>
+            </a:r>
+            <a:r>
+              <a:rPr sz="1600" b="0">
+                <a:solidFill>
+                  <a:srgbClr val="222222"/>
+                </a:solidFill>
+                <a:latin typeface="맑은 고딕"/>
+              </a:rPr>
+              <a:t> 보고서에서 정상 여부를 판정하는 세 열은 무엇이며 왜 그 셋인가?</a:t>
             </a:r>
           </a:p>
         </p:txBody>
@@ -14687,7 +15723,26 @@
                 </a:solidFill>
                 <a:latin typeface="맑은 고딕"/>
               </a:rPr>
-              <a:t>•  `FOR STANDBY`가 DBID를 유지한다. 실측 양쪽 모두 1852041610. 이 값이 다르면 Data Guard로 쓸 수 없다.</a:t>
+              <a:t>•  </a:t>
+            </a:r>
+            <a:r>
+              <a:rPr sz="1600" b="0">
+                <a:solidFill>
+                  <a:srgbClr val="222222"/>
+                </a:solidFill>
+                <a:latin typeface="Consolas"/>
+                <a:cs typeface="Consolas"/>
+              </a:rPr>
+              <a:t>FOR STANDBY</a:t>
+            </a:r>
+            <a:r>
+              <a:rPr sz="1600" b="0">
+                <a:solidFill>
+                  <a:srgbClr val="222222"/>
+                </a:solidFill>
+                <a:latin typeface="맑은 고딕"/>
+              </a:rPr>
+              <a:t>가 DBID를 유지한다. 실측 양쪽 모두 1852041610. 이 값이 다르면 Data Guard로 쓸 수 없다.</a:t>
             </a:r>
           </a:p>
           <a:p>
@@ -14703,7 +15758,26 @@
                 </a:solidFill>
                 <a:latin typeface="맑은 고딕"/>
               </a:rPr>
-              <a:t>•  `FROM ACTIVE DATABASE`는 백업 없이 운영 중 Primary에서 직접 읽는다. 실패해도 Primary는 무사하다.</a:t>
+              <a:t>•  </a:t>
+            </a:r>
+            <a:r>
+              <a:rPr sz="1600" b="0">
+                <a:solidFill>
+                  <a:srgbClr val="222222"/>
+                </a:solidFill>
+                <a:latin typeface="Consolas"/>
+                <a:cs typeface="Consolas"/>
+              </a:rPr>
+              <a:t>FROM ACTIVE DATABASE</a:t>
+            </a:r>
+            <a:r>
+              <a:rPr sz="1600" b="0">
+                <a:solidFill>
+                  <a:srgbClr val="222222"/>
+                </a:solidFill>
+                <a:latin typeface="맑은 고딕"/>
+              </a:rPr>
+              <a:t>는 백업 없이 운영 중 Primary에서 직접 읽는다. 실패해도 Primary는 무사하다.</a:t>
             </a:r>
           </a:p>
           <a:p>
@@ -14751,7 +15825,45 @@
                 </a:solidFill>
                 <a:latin typeface="맑은 고딕"/>
               </a:rPr>
-              <a:t>•  `PARAMETER_VALUE_CONVERT`가 db_name까지 바꾸므로 `SET DB_NAME='chicago'`로 되돌린다. SET이 이긴다.</a:t>
+              <a:t>•  </a:t>
+            </a:r>
+            <a:r>
+              <a:rPr sz="1600" b="0">
+                <a:solidFill>
+                  <a:srgbClr val="222222"/>
+                </a:solidFill>
+                <a:latin typeface="Consolas"/>
+                <a:cs typeface="Consolas"/>
+              </a:rPr>
+              <a:t>PARAMETER_VALUE_CONVERT</a:t>
+            </a:r>
+            <a:r>
+              <a:rPr sz="1600" b="0">
+                <a:solidFill>
+                  <a:srgbClr val="222222"/>
+                </a:solidFill>
+                <a:latin typeface="맑은 고딕"/>
+              </a:rPr>
+              <a:t>가 db_name까지 바꾸므로 </a:t>
+            </a:r>
+            <a:r>
+              <a:rPr sz="1600" b="0">
+                <a:solidFill>
+                  <a:srgbClr val="222222"/>
+                </a:solidFill>
+                <a:latin typeface="Consolas"/>
+                <a:cs typeface="Consolas"/>
+              </a:rPr>
+              <a:t>SET DB_NAME='chicago'</a:t>
+            </a:r>
+            <a:r>
+              <a:rPr sz="1600" b="0">
+                <a:solidFill>
+                  <a:srgbClr val="222222"/>
+                </a:solidFill>
+                <a:latin typeface="맑은 고딕"/>
+              </a:rPr>
+              <a:t>로 되돌린다. SET이 이긴다.</a:t>
             </a:r>
           </a:p>
           <a:p>
@@ -14783,7 +15895,26 @@
                 </a:solidFill>
                 <a:latin typeface="맑은 고딕"/>
               </a:rPr>
-              <a:t>•  `NOFILENAMECHECK`는 convert와 함께 써야 한다. 단독 사용은 안전장치만 제거한다.</a:t>
+              <a:t>•  </a:t>
+            </a:r>
+            <a:r>
+              <a:rPr sz="1600" b="0">
+                <a:solidFill>
+                  <a:srgbClr val="222222"/>
+                </a:solidFill>
+                <a:latin typeface="Consolas"/>
+                <a:cs typeface="Consolas"/>
+              </a:rPr>
+              <a:t>NOFILENAMECHECK</a:t>
+            </a:r>
+            <a:r>
+              <a:rPr sz="1600" b="0">
+                <a:solidFill>
+                  <a:srgbClr val="222222"/>
+                </a:solidFill>
+                <a:latin typeface="맑은 고딕"/>
+              </a:rPr>
+              <a:t>는 convert와 함께 써야 한다. 단독 사용은 안전장치만 제거한다.</a:t>
             </a:r>
           </a:p>
           <a:p>
@@ -14831,7 +15962,26 @@
                 </a:solidFill>
                 <a:latin typeface="맑은 고딕"/>
               </a:rPr>
-              <a:t>•  성공 조건 셋: rc=0, RMAN-·ORA- 줄 0개, `Finished Duplicate Db`. 실측 418줄 중 413번 줄.</a:t>
+              <a:t>•  성공 조건 셋: rc=0, RMAN-·ORA- 줄 0개, </a:t>
+            </a:r>
+            <a:r>
+              <a:rPr sz="1600" b="0">
+                <a:solidFill>
+                  <a:srgbClr val="222222"/>
+                </a:solidFill>
+                <a:latin typeface="Consolas"/>
+                <a:cs typeface="Consolas"/>
+              </a:rPr>
+              <a:t>Finished Duplicate Db</a:t>
+            </a:r>
+            <a:r>
+              <a:rPr sz="1600" b="0">
+                <a:solidFill>
+                  <a:srgbClr val="222222"/>
+                </a:solidFill>
+                <a:latin typeface="맑은 고딕"/>
+              </a:rPr>
+              <a:t>. 실측 418줄 중 413번 줄.</a:t>
             </a:r>
           </a:p>
           <a:p>
@@ -14863,7 +16013,26 @@
                 </a:solidFill>
                 <a:latin typeface="맑은 고딕"/>
               </a:rPr>
-              <a:t>•  가이드 결함 둘: `CREATE SPFILE FROM MEMORY`는 불필요(ORA-32002), PDB 여는 줄이 누락되어 있다.</a:t>
+              <a:t>•  가이드 결함 둘: </a:t>
+            </a:r>
+            <a:r>
+              <a:rPr sz="1600" b="0">
+                <a:solidFill>
+                  <a:srgbClr val="222222"/>
+                </a:solidFill>
+                <a:latin typeface="Consolas"/>
+                <a:cs typeface="Consolas"/>
+              </a:rPr>
+              <a:t>CREATE SPFILE FROM MEMORY</a:t>
+            </a:r>
+            <a:r>
+              <a:rPr sz="1600" b="0">
+                <a:solidFill>
+                  <a:srgbClr val="222222"/>
+                </a:solidFill>
+                <a:latin typeface="맑은 고딕"/>
+              </a:rPr>
+              <a:t>는 불필요(ORA-32002), PDB 여는 줄이 누락되어 있다.</a:t>
             </a:r>
           </a:p>
           <a:p>
@@ -14895,7 +16064,26 @@
                 </a:solidFill>
                 <a:latin typeface="맑은 고딕"/>
               </a:rPr>
-              <a:t>•  `DBMS_DBCOMP`의 둘째 인자는 디렉터리 객체가 아니라 파일 이름 접두어다. 결과는 dbs 아래에 생긴다.</a:t>
+              <a:t>•  </a:t>
+            </a:r>
+            <a:r>
+              <a:rPr sz="1600" b="0">
+                <a:solidFill>
+                  <a:srgbClr val="222222"/>
+                </a:solidFill>
+                <a:latin typeface="Consolas"/>
+                <a:cs typeface="Consolas"/>
+              </a:rPr>
+              <a:t>DBMS_DBCOMP</a:t>
+            </a:r>
+            <a:r>
+              <a:rPr sz="1600" b="0">
+                <a:solidFill>
+                  <a:srgbClr val="222222"/>
+                </a:solidFill>
+                <a:latin typeface="맑은 고딕"/>
+              </a:rPr>
+              <a:t>의 둘째 인자는 디렉터리 객체가 아니라 파일 이름 접두어다. 결과는 dbs 아래에 생긴다.</a:t>
             </a:r>
           </a:p>
           <a:p>
@@ -15374,7 +16562,17 @@
                 </a:solidFill>
                 <a:latin typeface="맑은 고딕"/>
               </a:rPr>
-              <a:t>•  차이를 만드는 것은 단 한 절, `FOR STANDBY`</a:t>
+              <a:t>•  차이를 만드는 것은 단 한 절, </a:t>
+            </a:r>
+            <a:r>
+              <a:rPr sz="1700" b="0">
+                <a:solidFill>
+                  <a:srgbClr val="222222"/>
+                </a:solidFill>
+                <a:latin typeface="Consolas"/>
+                <a:cs typeface="Consolas"/>
+              </a:rPr>
+              <a:t>FOR STANDBY</a:t>
             </a:r>
           </a:p>
           <a:p>
@@ -16294,7 +17492,26 @@
                 </a:solidFill>
                 <a:latin typeface="맑은 고딕"/>
               </a:rPr>
-              <a:t>•  루트 : 1, 3, 4, 7 — `/Chicago/` 바로 아래</a:t>
+              <a:t>•  루트 : 1, 3, 4, 7 — </a:t>
+            </a:r>
+            <a:r>
+              <a:rPr sz="1700" b="0">
+                <a:solidFill>
+                  <a:srgbClr val="222222"/>
+                </a:solidFill>
+                <a:latin typeface="Consolas"/>
+                <a:cs typeface="Consolas"/>
+              </a:rPr>
+              <a:t>/Chicago/</a:t>
+            </a:r>
+            <a:r>
+              <a:rPr sz="1700" b="0">
+                <a:solidFill>
+                  <a:srgbClr val="222222"/>
+                </a:solidFill>
+                <a:latin typeface="맑은 고딕"/>
+              </a:rPr>
+              <a:t> 바로 아래</a:t>
             </a:r>
           </a:p>
           <a:p>
@@ -16310,7 +17527,17 @@
                 </a:solidFill>
                 <a:latin typeface="맑은 고딕"/>
               </a:rPr>
-              <a:t>•  시드 PDB : 5, 6, 8 — `/Chicago/pdbseed/`</a:t>
+              <a:t>•  시드 PDB : 5, 6, 8 — </a:t>
+            </a:r>
+            <a:r>
+              <a:rPr sz="1700" b="0">
+                <a:solidFill>
+                  <a:srgbClr val="222222"/>
+                </a:solidFill>
+                <a:latin typeface="Consolas"/>
+                <a:cs typeface="Consolas"/>
+              </a:rPr>
+              <a:t>/Chicago/pdbseed/</a:t>
             </a:r>
           </a:p>
           <a:p>
@@ -16326,7 +17553,17 @@
                 </a:solidFill>
                 <a:latin typeface="맑은 고딕"/>
               </a:rPr>
-              <a:t>•  사용자 PDB : 9, 10, 11, 12 — `/Chicago/chicago_pdb1/`</a:t>
+              <a:t>•  사용자 PDB : 9, 10, 11, 12 — </a:t>
+            </a:r>
+            <a:r>
+              <a:rPr sz="1700" b="0">
+                <a:solidFill>
+                  <a:srgbClr val="222222"/>
+                </a:solidFill>
+                <a:latin typeface="Consolas"/>
+                <a:cs typeface="Consolas"/>
+              </a:rPr>
+              <a:t>/Chicago/chicago_pdb1/</a:t>
             </a:r>
           </a:p>
         </p:txBody>
